--- a/RA4 - Seguretat en xarxa/AA1 - Enginyeria social i phishing/RA4_AA1_Enginyeria_social_phishing.pptx
+++ b/RA4 - Seguretat en xarxa/AA1 - Enginyeria social i phishing/RA4_AA1_Enginyeria_social_phishing.pptx
@@ -2051,6 +2051,10 @@
           </a:solidFill>
           <a:ln/>
         </p:spPr>
+        <p:txBody>
+          <a:bodyPr/>
+          <a:p/>
+        </p:txBody>
       </p:sp>
       <p:sp>
         <p:nvSpPr>
@@ -2071,6 +2075,10 @@
           </a:solidFill>
           <a:ln/>
         </p:spPr>
+        <p:txBody>
+          <a:bodyPr/>
+          <a:p/>
+        </p:txBody>
       </p:sp>
       <p:sp>
         <p:nvSpPr>
@@ -2496,6 +2504,10 @@
             </a:outerShdw>
           </a:effectLst>
         </p:spPr>
+        <p:txBody>
+          <a:bodyPr/>
+          <a:p/>
+        </p:txBody>
       </p:sp>
       <p:sp>
         <p:nvSpPr>
@@ -2516,6 +2528,10 @@
           </a:solidFill>
           <a:ln/>
         </p:spPr>
+        <p:txBody>
+          <a:bodyPr/>
+          <a:p/>
+        </p:txBody>
       </p:sp>
       <p:pic>
         <p:nvPicPr>
@@ -2655,6 +2671,10 @@
             </a:outerShdw>
           </a:effectLst>
         </p:spPr>
+        <p:txBody>
+          <a:bodyPr/>
+          <a:p/>
+        </p:txBody>
       </p:sp>
       <p:sp>
         <p:nvSpPr>
@@ -2675,6 +2695,10 @@
           </a:solidFill>
           <a:ln/>
         </p:spPr>
+        <p:txBody>
+          <a:bodyPr/>
+          <a:p/>
+        </p:txBody>
       </p:sp>
       <p:pic>
         <p:nvPicPr>
@@ -2814,6 +2838,10 @@
             </a:outerShdw>
           </a:effectLst>
         </p:spPr>
+        <p:txBody>
+          <a:bodyPr/>
+          <a:p/>
+        </p:txBody>
       </p:sp>
       <p:sp>
         <p:nvSpPr>
@@ -2834,6 +2862,10 @@
           </a:solidFill>
           <a:ln/>
         </p:spPr>
+        <p:txBody>
+          <a:bodyPr/>
+          <a:p/>
+        </p:txBody>
       </p:sp>
       <p:pic>
         <p:nvPicPr>
@@ -3413,6 +3445,10 @@
             </a:outerShdw>
           </a:effectLst>
         </p:spPr>
+        <p:txBody>
+          <a:bodyPr/>
+          <a:p/>
+        </p:txBody>
       </p:sp>
       <p:sp>
         <p:nvSpPr>
@@ -3433,6 +3469,10 @@
           </a:solidFill>
           <a:ln/>
         </p:spPr>
+        <p:txBody>
+          <a:bodyPr/>
+          <a:p/>
+        </p:txBody>
       </p:sp>
       <p:pic>
         <p:nvPicPr>
@@ -3572,6 +3612,10 @@
             </a:outerShdw>
           </a:effectLst>
         </p:spPr>
+        <p:txBody>
+          <a:bodyPr/>
+          <a:p/>
+        </p:txBody>
       </p:sp>
       <p:sp>
         <p:nvSpPr>
@@ -3592,6 +3636,10 @@
           </a:solidFill>
           <a:ln/>
         </p:spPr>
+        <p:txBody>
+          <a:bodyPr/>
+          <a:p/>
+        </p:txBody>
       </p:sp>
       <p:pic>
         <p:nvPicPr>
@@ -3731,6 +3779,10 @@
             </a:outerShdw>
           </a:effectLst>
         </p:spPr>
+        <p:txBody>
+          <a:bodyPr/>
+          <a:p/>
+        </p:txBody>
       </p:sp>
       <p:sp>
         <p:nvSpPr>
@@ -3751,6 +3803,10 @@
           </a:solidFill>
           <a:ln/>
         </p:spPr>
+        <p:txBody>
+          <a:bodyPr/>
+          <a:p/>
+        </p:txBody>
       </p:sp>
       <p:pic>
         <p:nvPicPr>
@@ -4674,7 +4730,7 @@
                 <a:ea typeface="Calibri" pitchFamily="34" charset="-122"/>
                 <a:cs typeface="Calibri" pitchFamily="34" charset="-120"/>
               </a:rPr>
-              <a:t>Llicència Creative Commons BY-NC-SA · Institut Obert de Catalunya, 2011 (materials adaptats i ampliats)</a:t>
+              <a:t>Llicència CC BY-SA 4.0 · Adaptat de "Materials" (SMX-0226SI), Carlos Alonso Martínez, Escola Pia de Mataró</a:t>
             </a:r>
             <a:endParaRPr lang="en-US" sz="1050" dirty="0"/>
           </a:p>
@@ -4901,6 +4957,10 @@
             </a:outerShdw>
           </a:effectLst>
         </p:spPr>
+        <p:txBody>
+          <a:bodyPr/>
+          <a:p/>
+        </p:txBody>
       </p:sp>
       <p:sp>
         <p:nvSpPr>
@@ -4921,6 +4981,10 @@
           </a:solidFill>
           <a:ln/>
         </p:spPr>
+        <p:txBody>
+          <a:bodyPr/>
+          <a:p/>
+        </p:txBody>
       </p:sp>
       <p:pic>
         <p:nvPicPr>
@@ -5060,6 +5124,10 @@
             </a:outerShdw>
           </a:effectLst>
         </p:spPr>
+        <p:txBody>
+          <a:bodyPr/>
+          <a:p/>
+        </p:txBody>
       </p:sp>
       <p:sp>
         <p:nvSpPr>
@@ -5080,6 +5148,10 @@
           </a:solidFill>
           <a:ln/>
         </p:spPr>
+        <p:txBody>
+          <a:bodyPr/>
+          <a:p/>
+        </p:txBody>
       </p:sp>
       <p:pic>
         <p:nvPicPr>
@@ -5219,6 +5291,10 @@
             </a:outerShdw>
           </a:effectLst>
         </p:spPr>
+        <p:txBody>
+          <a:bodyPr/>
+          <a:p/>
+        </p:txBody>
       </p:sp>
       <p:sp>
         <p:nvSpPr>
@@ -5239,6 +5315,10 @@
           </a:solidFill>
           <a:ln/>
         </p:spPr>
+        <p:txBody>
+          <a:bodyPr/>
+          <a:p/>
+        </p:txBody>
       </p:sp>
       <p:pic>
         <p:nvPicPr>
@@ -6593,6 +6673,10 @@
             </a:outerShdw>
           </a:effectLst>
         </p:spPr>
+        <p:txBody>
+          <a:bodyPr/>
+          <a:p/>
+        </p:txBody>
       </p:sp>
       <p:sp>
         <p:nvSpPr>
@@ -6613,6 +6697,10 @@
           </a:solidFill>
           <a:ln/>
         </p:spPr>
+        <p:txBody>
+          <a:bodyPr/>
+          <a:p/>
+        </p:txBody>
       </p:sp>
       <p:pic>
         <p:nvPicPr>
@@ -6752,6 +6840,10 @@
             </a:outerShdw>
           </a:effectLst>
         </p:spPr>
+        <p:txBody>
+          <a:bodyPr/>
+          <a:p/>
+        </p:txBody>
       </p:sp>
       <p:sp>
         <p:nvSpPr>
@@ -6772,6 +6864,10 @@
           </a:solidFill>
           <a:ln/>
         </p:spPr>
+        <p:txBody>
+          <a:bodyPr/>
+          <a:p/>
+        </p:txBody>
       </p:sp>
       <p:pic>
         <p:nvPicPr>
@@ -6899,6 +6995,10 @@
           </a:solidFill>
           <a:ln/>
         </p:spPr>
+        <p:txBody>
+          <a:bodyPr/>
+          <a:p/>
+        </p:txBody>
       </p:sp>
       <p:pic>
         <p:nvPicPr>
@@ -7148,6 +7248,10 @@
             </a:outerShdw>
           </a:effectLst>
         </p:spPr>
+        <p:txBody>
+          <a:bodyPr/>
+          <a:p/>
+        </p:txBody>
       </p:sp>
       <p:sp>
         <p:nvSpPr>
@@ -7168,6 +7272,10 @@
           </a:solidFill>
           <a:ln/>
         </p:spPr>
+        <p:txBody>
+          <a:bodyPr/>
+          <a:p/>
+        </p:txBody>
       </p:sp>
       <p:pic>
         <p:nvPicPr>
@@ -7307,6 +7415,10 @@
             </a:outerShdw>
           </a:effectLst>
         </p:spPr>
+        <p:txBody>
+          <a:bodyPr/>
+          <a:p/>
+        </p:txBody>
       </p:sp>
       <p:sp>
         <p:nvSpPr>
@@ -7327,6 +7439,10 @@
           </a:solidFill>
           <a:ln/>
         </p:spPr>
+        <p:txBody>
+          <a:bodyPr/>
+          <a:p/>
+        </p:txBody>
       </p:sp>
       <p:pic>
         <p:nvPicPr>
@@ -7892,6 +8008,10 @@
           </a:solidFill>
           <a:ln/>
         </p:spPr>
+        <p:txBody>
+          <a:bodyPr/>
+          <a:p/>
+        </p:txBody>
       </p:sp>
       <p:pic>
         <p:nvPicPr>
@@ -8711,6 +8831,10 @@
           </a:solidFill>
           <a:ln/>
         </p:spPr>
+        <p:txBody>
+          <a:bodyPr/>
+          <a:p/>
+        </p:txBody>
       </p:sp>
       <p:pic>
         <p:nvPicPr>
